--- a/看見神的愛.pptx
+++ b/看見神的愛.pptx
@@ -5,8 +5,11 @@
     <p:sldMasterId id="2147483660" r:id="rId1"/>
   </p:sldMasterIdLst>
   <p:sldIdLst>
-    <p:sldId id="256" r:id="rId2"/>
-    <p:sldId id="257" r:id="rId3"/>
+    <p:sldId id="353" r:id="rId2"/>
+    <p:sldId id="390" r:id="rId3"/>
+    <p:sldId id="599" r:id="rId4"/>
+    <p:sldId id="600" r:id="rId5"/>
+    <p:sldId id="601" r:id="rId6"/>
   </p:sldIdLst>
   <p:sldSz cx="12192000" cy="6858000"/>
   <p:notesSz cx="6858000" cy="9144000"/>
@@ -162,10 +165,9 @@
           <a:lstStyle/>
           <a:p>
             <a:r>
-              <a:rPr lang="zh-TW" altLang="en-US" smtClean="0"/>
+              <a:rPr lang="zh-TW" altLang="en-US"/>
               <a:t>按一下以編輯母片標題樣式</a:t>
             </a:r>
-            <a:endParaRPr lang="zh-TW" altLang="en-US"/>
           </a:p>
         </p:txBody>
       </p:sp>
@@ -281,10 +283,9 @@
           </a:lstStyle>
           <a:p>
             <a:r>
-              <a:rPr lang="zh-TW" altLang="en-US" smtClean="0"/>
+              <a:rPr lang="zh-TW" altLang="en-US"/>
               <a:t>按一下以編輯母片副標題樣式</a:t>
             </a:r>
-            <a:endParaRPr lang="zh-TW" altLang="en-US"/>
           </a:p>
         </p:txBody>
       </p:sp>
@@ -305,7 +306,7 @@
           <a:p>
             <a:fld id="{1169722A-0BAF-4B82-A8FD-B3157334DE09}" type="datetimeFigureOut">
               <a:rPr lang="zh-TW" altLang="en-US" smtClean="0"/>
-              <a:t>2020/2/6</a:t>
+              <a:t>2025/5/9</a:t>
             </a:fld>
             <a:endParaRPr lang="zh-TW" altLang="en-US"/>
           </a:p>
@@ -394,10 +395,9 @@
           <a:lstStyle/>
           <a:p>
             <a:r>
-              <a:rPr lang="zh-TW" altLang="en-US" smtClean="0"/>
+              <a:rPr lang="zh-TW" altLang="en-US"/>
               <a:t>按一下以編輯母片標題樣式</a:t>
             </a:r>
-            <a:endParaRPr lang="zh-TW" altLang="en-US"/>
           </a:p>
         </p:txBody>
       </p:sp>
@@ -418,38 +418,37 @@
           <a:p>
             <a:pPr lvl="0"/>
             <a:r>
-              <a:rPr lang="zh-TW" altLang="en-US" smtClean="0"/>
+              <a:rPr lang="zh-TW" altLang="en-US"/>
               <a:t>按一下以編輯母片文字樣式</a:t>
             </a:r>
           </a:p>
           <a:p>
             <a:pPr lvl="1"/>
             <a:r>
-              <a:rPr lang="zh-TW" altLang="en-US" smtClean="0"/>
+              <a:rPr lang="zh-TW" altLang="en-US"/>
               <a:t>第二層</a:t>
             </a:r>
           </a:p>
           <a:p>
             <a:pPr lvl="2"/>
             <a:r>
-              <a:rPr lang="zh-TW" altLang="en-US" smtClean="0"/>
+              <a:rPr lang="zh-TW" altLang="en-US"/>
               <a:t>第三層</a:t>
             </a:r>
           </a:p>
           <a:p>
             <a:pPr lvl="3"/>
             <a:r>
-              <a:rPr lang="zh-TW" altLang="en-US" smtClean="0"/>
+              <a:rPr lang="zh-TW" altLang="en-US"/>
               <a:t>第四層</a:t>
             </a:r>
           </a:p>
           <a:p>
             <a:pPr lvl="4"/>
             <a:r>
-              <a:rPr lang="zh-TW" altLang="en-US" smtClean="0"/>
+              <a:rPr lang="zh-TW" altLang="en-US"/>
               <a:t>第五層</a:t>
             </a:r>
-            <a:endParaRPr lang="zh-TW" altLang="en-US"/>
           </a:p>
         </p:txBody>
       </p:sp>
@@ -470,7 +469,7 @@
           <a:p>
             <a:fld id="{1169722A-0BAF-4B82-A8FD-B3157334DE09}" type="datetimeFigureOut">
               <a:rPr lang="zh-TW" altLang="en-US" smtClean="0"/>
-              <a:t>2020/2/6</a:t>
+              <a:t>2025/5/9</a:t>
             </a:fld>
             <a:endParaRPr lang="zh-TW" altLang="en-US"/>
           </a:p>
@@ -564,10 +563,9 @@
           <a:lstStyle/>
           <a:p>
             <a:r>
-              <a:rPr lang="zh-TW" altLang="en-US" smtClean="0"/>
+              <a:rPr lang="zh-TW" altLang="en-US"/>
               <a:t>按一下以編輯母片標題樣式</a:t>
             </a:r>
-            <a:endParaRPr lang="zh-TW" altLang="en-US"/>
           </a:p>
         </p:txBody>
       </p:sp>
@@ -593,38 +591,37 @@
           <a:p>
             <a:pPr lvl="0"/>
             <a:r>
-              <a:rPr lang="zh-TW" altLang="en-US" smtClean="0"/>
+              <a:rPr lang="zh-TW" altLang="en-US"/>
               <a:t>按一下以編輯母片文字樣式</a:t>
             </a:r>
           </a:p>
           <a:p>
             <a:pPr lvl="1"/>
             <a:r>
-              <a:rPr lang="zh-TW" altLang="en-US" smtClean="0"/>
+              <a:rPr lang="zh-TW" altLang="en-US"/>
               <a:t>第二層</a:t>
             </a:r>
           </a:p>
           <a:p>
             <a:pPr lvl="2"/>
             <a:r>
-              <a:rPr lang="zh-TW" altLang="en-US" smtClean="0"/>
+              <a:rPr lang="zh-TW" altLang="en-US"/>
               <a:t>第三層</a:t>
             </a:r>
           </a:p>
           <a:p>
             <a:pPr lvl="3"/>
             <a:r>
-              <a:rPr lang="zh-TW" altLang="en-US" smtClean="0"/>
+              <a:rPr lang="zh-TW" altLang="en-US"/>
               <a:t>第四層</a:t>
             </a:r>
           </a:p>
           <a:p>
             <a:pPr lvl="4"/>
             <a:r>
-              <a:rPr lang="zh-TW" altLang="en-US" smtClean="0"/>
+              <a:rPr lang="zh-TW" altLang="en-US"/>
               <a:t>第五層</a:t>
             </a:r>
-            <a:endParaRPr lang="zh-TW" altLang="en-US"/>
           </a:p>
         </p:txBody>
       </p:sp>
@@ -645,7 +642,7 @@
           <a:p>
             <a:fld id="{1169722A-0BAF-4B82-A8FD-B3157334DE09}" type="datetimeFigureOut">
               <a:rPr lang="zh-TW" altLang="en-US" smtClean="0"/>
-              <a:t>2020/2/6</a:t>
+              <a:t>2025/5/9</a:t>
             </a:fld>
             <a:endParaRPr lang="zh-TW" altLang="en-US"/>
           </a:p>
@@ -734,10 +731,9 @@
           <a:lstStyle/>
           <a:p>
             <a:r>
-              <a:rPr lang="zh-TW" altLang="en-US" smtClean="0"/>
+              <a:rPr lang="zh-TW" altLang="en-US"/>
               <a:t>按一下以編輯母片標題樣式</a:t>
             </a:r>
-            <a:endParaRPr lang="zh-TW" altLang="en-US"/>
           </a:p>
         </p:txBody>
       </p:sp>
@@ -758,38 +754,37 @@
           <a:p>
             <a:pPr lvl="0"/>
             <a:r>
-              <a:rPr lang="zh-TW" altLang="en-US" smtClean="0"/>
+              <a:rPr lang="zh-TW" altLang="en-US"/>
               <a:t>按一下以編輯母片文字樣式</a:t>
             </a:r>
           </a:p>
           <a:p>
             <a:pPr lvl="1"/>
             <a:r>
-              <a:rPr lang="zh-TW" altLang="en-US" smtClean="0"/>
+              <a:rPr lang="zh-TW" altLang="en-US"/>
               <a:t>第二層</a:t>
             </a:r>
           </a:p>
           <a:p>
             <a:pPr lvl="2"/>
             <a:r>
-              <a:rPr lang="zh-TW" altLang="en-US" smtClean="0"/>
+              <a:rPr lang="zh-TW" altLang="en-US"/>
               <a:t>第三層</a:t>
             </a:r>
           </a:p>
           <a:p>
             <a:pPr lvl="3"/>
             <a:r>
-              <a:rPr lang="zh-TW" altLang="en-US" smtClean="0"/>
+              <a:rPr lang="zh-TW" altLang="en-US"/>
               <a:t>第四層</a:t>
             </a:r>
           </a:p>
           <a:p>
             <a:pPr lvl="4"/>
             <a:r>
-              <a:rPr lang="zh-TW" altLang="en-US" smtClean="0"/>
+              <a:rPr lang="zh-TW" altLang="en-US"/>
               <a:t>第五層</a:t>
             </a:r>
-            <a:endParaRPr lang="zh-TW" altLang="en-US"/>
           </a:p>
         </p:txBody>
       </p:sp>
@@ -810,7 +805,7 @@
           <a:p>
             <a:fld id="{1169722A-0BAF-4B82-A8FD-B3157334DE09}" type="datetimeFigureOut">
               <a:rPr lang="zh-TW" altLang="en-US" smtClean="0"/>
-              <a:t>2020/2/6</a:t>
+              <a:t>2025/5/9</a:t>
             </a:fld>
             <a:endParaRPr lang="zh-TW" altLang="en-US"/>
           </a:p>
@@ -908,10 +903,9 @@
           </a:lstStyle>
           <a:p>
             <a:r>
-              <a:rPr lang="zh-TW" altLang="en-US" smtClean="0"/>
+              <a:rPr lang="zh-TW" altLang="en-US"/>
               <a:t>按一下以編輯母片標題樣式</a:t>
             </a:r>
-            <a:endParaRPr lang="zh-TW" altLang="en-US"/>
           </a:p>
         </p:txBody>
       </p:sp>
@@ -1028,7 +1022,7 @@
           <a:p>
             <a:pPr lvl="0"/>
             <a:r>
-              <a:rPr lang="zh-TW" altLang="en-US" smtClean="0"/>
+              <a:rPr lang="zh-TW" altLang="en-US"/>
               <a:t>按一下以編輯母片文字樣式</a:t>
             </a:r>
           </a:p>
@@ -1051,7 +1045,7 @@
           <a:p>
             <a:fld id="{1169722A-0BAF-4B82-A8FD-B3157334DE09}" type="datetimeFigureOut">
               <a:rPr lang="zh-TW" altLang="en-US" smtClean="0"/>
-              <a:t>2020/2/6</a:t>
+              <a:t>2025/5/9</a:t>
             </a:fld>
             <a:endParaRPr lang="zh-TW" altLang="en-US"/>
           </a:p>
@@ -1140,10 +1134,9 @@
           <a:lstStyle/>
           <a:p>
             <a:r>
-              <a:rPr lang="zh-TW" altLang="en-US" smtClean="0"/>
+              <a:rPr lang="zh-TW" altLang="en-US"/>
               <a:t>按一下以編輯母片標題樣式</a:t>
             </a:r>
-            <a:endParaRPr lang="zh-TW" altLang="en-US"/>
           </a:p>
         </p:txBody>
       </p:sp>
@@ -1197,38 +1190,37 @@
           <a:p>
             <a:pPr lvl="0"/>
             <a:r>
-              <a:rPr lang="zh-TW" altLang="en-US" smtClean="0"/>
+              <a:rPr lang="zh-TW" altLang="en-US"/>
               <a:t>按一下以編輯母片文字樣式</a:t>
             </a:r>
           </a:p>
           <a:p>
             <a:pPr lvl="1"/>
             <a:r>
-              <a:rPr lang="zh-TW" altLang="en-US" smtClean="0"/>
+              <a:rPr lang="zh-TW" altLang="en-US"/>
               <a:t>第二層</a:t>
             </a:r>
           </a:p>
           <a:p>
             <a:pPr lvl="2"/>
             <a:r>
-              <a:rPr lang="zh-TW" altLang="en-US" smtClean="0"/>
+              <a:rPr lang="zh-TW" altLang="en-US"/>
               <a:t>第三層</a:t>
             </a:r>
           </a:p>
           <a:p>
             <a:pPr lvl="3"/>
             <a:r>
-              <a:rPr lang="zh-TW" altLang="en-US" smtClean="0"/>
+              <a:rPr lang="zh-TW" altLang="en-US"/>
               <a:t>第四層</a:t>
             </a:r>
           </a:p>
           <a:p>
             <a:pPr lvl="4"/>
             <a:r>
-              <a:rPr lang="zh-TW" altLang="en-US" smtClean="0"/>
+              <a:rPr lang="zh-TW" altLang="en-US"/>
               <a:t>第五層</a:t>
             </a:r>
-            <a:endParaRPr lang="zh-TW" altLang="en-US"/>
           </a:p>
         </p:txBody>
       </p:sp>
@@ -1282,38 +1274,37 @@
           <a:p>
             <a:pPr lvl="0"/>
             <a:r>
-              <a:rPr lang="zh-TW" altLang="en-US" smtClean="0"/>
+              <a:rPr lang="zh-TW" altLang="en-US"/>
               <a:t>按一下以編輯母片文字樣式</a:t>
             </a:r>
           </a:p>
           <a:p>
             <a:pPr lvl="1"/>
             <a:r>
-              <a:rPr lang="zh-TW" altLang="en-US" smtClean="0"/>
+              <a:rPr lang="zh-TW" altLang="en-US"/>
               <a:t>第二層</a:t>
             </a:r>
           </a:p>
           <a:p>
             <a:pPr lvl="2"/>
             <a:r>
-              <a:rPr lang="zh-TW" altLang="en-US" smtClean="0"/>
+              <a:rPr lang="zh-TW" altLang="en-US"/>
               <a:t>第三層</a:t>
             </a:r>
           </a:p>
           <a:p>
             <a:pPr lvl="3"/>
             <a:r>
-              <a:rPr lang="zh-TW" altLang="en-US" smtClean="0"/>
+              <a:rPr lang="zh-TW" altLang="en-US"/>
               <a:t>第四層</a:t>
             </a:r>
           </a:p>
           <a:p>
             <a:pPr lvl="4"/>
             <a:r>
-              <a:rPr lang="zh-TW" altLang="en-US" smtClean="0"/>
+              <a:rPr lang="zh-TW" altLang="en-US"/>
               <a:t>第五層</a:t>
             </a:r>
-            <a:endParaRPr lang="zh-TW" altLang="en-US"/>
           </a:p>
         </p:txBody>
       </p:sp>
@@ -1334,7 +1325,7 @@
           <a:p>
             <a:fld id="{1169722A-0BAF-4B82-A8FD-B3157334DE09}" type="datetimeFigureOut">
               <a:rPr lang="zh-TW" altLang="en-US" smtClean="0"/>
-              <a:t>2020/2/6</a:t>
+              <a:t>2025/5/9</a:t>
             </a:fld>
             <a:endParaRPr lang="zh-TW" altLang="en-US"/>
           </a:p>
@@ -1427,10 +1418,9 @@
           </a:lstStyle>
           <a:p>
             <a:r>
-              <a:rPr lang="zh-TW" altLang="en-US" smtClean="0"/>
+              <a:rPr lang="zh-TW" altLang="en-US"/>
               <a:t>按一下以編輯母片標題樣式</a:t>
             </a:r>
-            <a:endParaRPr lang="zh-TW" altLang="en-US"/>
           </a:p>
         </p:txBody>
       </p:sp>
@@ -1493,7 +1483,7 @@
           <a:p>
             <a:pPr lvl="0"/>
             <a:r>
-              <a:rPr lang="zh-TW" altLang="en-US" smtClean="0"/>
+              <a:rPr lang="zh-TW" altLang="en-US"/>
               <a:t>按一下以編輯母片文字樣式</a:t>
             </a:r>
           </a:p>
@@ -1549,38 +1539,37 @@
           <a:p>
             <a:pPr lvl="0"/>
             <a:r>
-              <a:rPr lang="zh-TW" altLang="en-US" smtClean="0"/>
+              <a:rPr lang="zh-TW" altLang="en-US"/>
               <a:t>按一下以編輯母片文字樣式</a:t>
             </a:r>
           </a:p>
           <a:p>
             <a:pPr lvl="1"/>
             <a:r>
-              <a:rPr lang="zh-TW" altLang="en-US" smtClean="0"/>
+              <a:rPr lang="zh-TW" altLang="en-US"/>
               <a:t>第二層</a:t>
             </a:r>
           </a:p>
           <a:p>
             <a:pPr lvl="2"/>
             <a:r>
-              <a:rPr lang="zh-TW" altLang="en-US" smtClean="0"/>
+              <a:rPr lang="zh-TW" altLang="en-US"/>
               <a:t>第三層</a:t>
             </a:r>
           </a:p>
           <a:p>
             <a:pPr lvl="3"/>
             <a:r>
-              <a:rPr lang="zh-TW" altLang="en-US" smtClean="0"/>
+              <a:rPr lang="zh-TW" altLang="en-US"/>
               <a:t>第四層</a:t>
             </a:r>
           </a:p>
           <a:p>
             <a:pPr lvl="4"/>
             <a:r>
-              <a:rPr lang="zh-TW" altLang="en-US" smtClean="0"/>
+              <a:rPr lang="zh-TW" altLang="en-US"/>
               <a:t>第五層</a:t>
             </a:r>
-            <a:endParaRPr lang="zh-TW" altLang="en-US"/>
           </a:p>
         </p:txBody>
       </p:sp>
@@ -1643,7 +1632,7 @@
           <a:p>
             <a:pPr lvl="0"/>
             <a:r>
-              <a:rPr lang="zh-TW" altLang="en-US" smtClean="0"/>
+              <a:rPr lang="zh-TW" altLang="en-US"/>
               <a:t>按一下以編輯母片文字樣式</a:t>
             </a:r>
           </a:p>
@@ -1699,38 +1688,37 @@
           <a:p>
             <a:pPr lvl="0"/>
             <a:r>
-              <a:rPr lang="zh-TW" altLang="en-US" smtClean="0"/>
+              <a:rPr lang="zh-TW" altLang="en-US"/>
               <a:t>按一下以編輯母片文字樣式</a:t>
             </a:r>
           </a:p>
           <a:p>
             <a:pPr lvl="1"/>
             <a:r>
-              <a:rPr lang="zh-TW" altLang="en-US" smtClean="0"/>
+              <a:rPr lang="zh-TW" altLang="en-US"/>
               <a:t>第二層</a:t>
             </a:r>
           </a:p>
           <a:p>
             <a:pPr lvl="2"/>
             <a:r>
-              <a:rPr lang="zh-TW" altLang="en-US" smtClean="0"/>
+              <a:rPr lang="zh-TW" altLang="en-US"/>
               <a:t>第三層</a:t>
             </a:r>
           </a:p>
           <a:p>
             <a:pPr lvl="3"/>
             <a:r>
-              <a:rPr lang="zh-TW" altLang="en-US" smtClean="0"/>
+              <a:rPr lang="zh-TW" altLang="en-US"/>
               <a:t>第四層</a:t>
             </a:r>
           </a:p>
           <a:p>
             <a:pPr lvl="4"/>
             <a:r>
-              <a:rPr lang="zh-TW" altLang="en-US" smtClean="0"/>
+              <a:rPr lang="zh-TW" altLang="en-US"/>
               <a:t>第五層</a:t>
             </a:r>
-            <a:endParaRPr lang="zh-TW" altLang="en-US"/>
           </a:p>
         </p:txBody>
       </p:sp>
@@ -1751,7 +1739,7 @@
           <a:p>
             <a:fld id="{1169722A-0BAF-4B82-A8FD-B3157334DE09}" type="datetimeFigureOut">
               <a:rPr lang="zh-TW" altLang="en-US" smtClean="0"/>
-              <a:t>2020/2/6</a:t>
+              <a:t>2025/5/9</a:t>
             </a:fld>
             <a:endParaRPr lang="zh-TW" altLang="en-US"/>
           </a:p>
@@ -1840,10 +1828,9 @@
           <a:lstStyle/>
           <a:p>
             <a:r>
-              <a:rPr lang="zh-TW" altLang="en-US" smtClean="0"/>
+              <a:rPr lang="zh-TW" altLang="en-US"/>
               <a:t>按一下以編輯母片標題樣式</a:t>
             </a:r>
-            <a:endParaRPr lang="zh-TW" altLang="en-US"/>
           </a:p>
         </p:txBody>
       </p:sp>
@@ -1864,7 +1851,7 @@
           <a:p>
             <a:fld id="{1169722A-0BAF-4B82-A8FD-B3157334DE09}" type="datetimeFigureOut">
               <a:rPr lang="zh-TW" altLang="en-US" smtClean="0"/>
-              <a:t>2020/2/6</a:t>
+              <a:t>2025/5/9</a:t>
             </a:fld>
             <a:endParaRPr lang="zh-TW" altLang="en-US"/>
           </a:p>
@@ -1954,7 +1941,7 @@
           <a:p>
             <a:fld id="{1169722A-0BAF-4B82-A8FD-B3157334DE09}" type="datetimeFigureOut">
               <a:rPr lang="zh-TW" altLang="en-US" smtClean="0"/>
-              <a:t>2020/2/6</a:t>
+              <a:t>2025/5/9</a:t>
             </a:fld>
             <a:endParaRPr lang="zh-TW" altLang="en-US"/>
           </a:p>
@@ -2052,10 +2039,9 @@
           </a:lstStyle>
           <a:p>
             <a:r>
-              <a:rPr lang="zh-TW" altLang="en-US" smtClean="0"/>
+              <a:rPr lang="zh-TW" altLang="en-US"/>
               <a:t>按一下以編輯母片標題樣式</a:t>
             </a:r>
-            <a:endParaRPr lang="zh-TW" altLang="en-US"/>
           </a:p>
         </p:txBody>
       </p:sp>
@@ -2109,38 +2095,37 @@
           <a:p>
             <a:pPr lvl="0"/>
             <a:r>
-              <a:rPr lang="zh-TW" altLang="en-US" smtClean="0"/>
+              <a:rPr lang="zh-TW" altLang="en-US"/>
               <a:t>按一下以編輯母片文字樣式</a:t>
             </a:r>
           </a:p>
           <a:p>
             <a:pPr lvl="1"/>
             <a:r>
-              <a:rPr lang="zh-TW" altLang="en-US" smtClean="0"/>
+              <a:rPr lang="zh-TW" altLang="en-US"/>
               <a:t>第二層</a:t>
             </a:r>
           </a:p>
           <a:p>
             <a:pPr lvl="2"/>
             <a:r>
-              <a:rPr lang="zh-TW" altLang="en-US" smtClean="0"/>
+              <a:rPr lang="zh-TW" altLang="en-US"/>
               <a:t>第三層</a:t>
             </a:r>
           </a:p>
           <a:p>
             <a:pPr lvl="3"/>
             <a:r>
-              <a:rPr lang="zh-TW" altLang="en-US" smtClean="0"/>
+              <a:rPr lang="zh-TW" altLang="en-US"/>
               <a:t>第四層</a:t>
             </a:r>
           </a:p>
           <a:p>
             <a:pPr lvl="4"/>
             <a:r>
-              <a:rPr lang="zh-TW" altLang="en-US" smtClean="0"/>
+              <a:rPr lang="zh-TW" altLang="en-US"/>
               <a:t>第五層</a:t>
             </a:r>
-            <a:endParaRPr lang="zh-TW" altLang="en-US"/>
           </a:p>
         </p:txBody>
       </p:sp>
@@ -2203,7 +2188,7 @@
           <a:p>
             <a:pPr lvl="0"/>
             <a:r>
-              <a:rPr lang="zh-TW" altLang="en-US" smtClean="0"/>
+              <a:rPr lang="zh-TW" altLang="en-US"/>
               <a:t>按一下以編輯母片文字樣式</a:t>
             </a:r>
           </a:p>
@@ -2226,7 +2211,7 @@
           <a:p>
             <a:fld id="{1169722A-0BAF-4B82-A8FD-B3157334DE09}" type="datetimeFigureOut">
               <a:rPr lang="zh-TW" altLang="en-US" smtClean="0"/>
-              <a:t>2020/2/6</a:t>
+              <a:t>2025/5/9</a:t>
             </a:fld>
             <a:endParaRPr lang="zh-TW" altLang="en-US"/>
           </a:p>
@@ -2324,10 +2309,9 @@
           </a:lstStyle>
           <a:p>
             <a:r>
-              <a:rPr lang="zh-TW" altLang="en-US" smtClean="0"/>
+              <a:rPr lang="zh-TW" altLang="en-US"/>
               <a:t>按一下以編輯母片標題樣式</a:t>
             </a:r>
-            <a:endParaRPr lang="zh-TW" altLang="en-US"/>
           </a:p>
         </p:txBody>
       </p:sp>
@@ -2389,10 +2373,9 @@
           </a:lstStyle>
           <a:p>
             <a:r>
-              <a:rPr lang="zh-TW" altLang="en-US" smtClean="0"/>
+              <a:rPr lang="zh-TW" altLang="en-US"/>
               <a:t>按一下圖示以新增圖片</a:t>
             </a:r>
-            <a:endParaRPr lang="zh-TW" altLang="en-US"/>
           </a:p>
         </p:txBody>
       </p:sp>
@@ -2455,7 +2438,7 @@
           <a:p>
             <a:pPr lvl="0"/>
             <a:r>
-              <a:rPr lang="zh-TW" altLang="en-US" smtClean="0"/>
+              <a:rPr lang="zh-TW" altLang="en-US"/>
               <a:t>按一下以編輯母片文字樣式</a:t>
             </a:r>
           </a:p>
@@ -2478,7 +2461,7 @@
           <a:p>
             <a:fld id="{1169722A-0BAF-4B82-A8FD-B3157334DE09}" type="datetimeFigureOut">
               <a:rPr lang="zh-TW" altLang="en-US" smtClean="0"/>
-              <a:t>2020/2/6</a:t>
+              <a:t>2025/5/9</a:t>
             </a:fld>
             <a:endParaRPr lang="zh-TW" altLang="en-US"/>
           </a:p>
@@ -2587,10 +2570,9 @@
           <a:lstStyle/>
           <a:p>
             <a:r>
-              <a:rPr lang="zh-TW" altLang="en-US" smtClean="0"/>
+              <a:rPr lang="zh-TW" altLang="en-US"/>
               <a:t>按一下以編輯母片標題樣式</a:t>
             </a:r>
-            <a:endParaRPr lang="zh-TW" altLang="en-US"/>
           </a:p>
         </p:txBody>
       </p:sp>
@@ -2621,38 +2603,37 @@
           <a:p>
             <a:pPr lvl="0"/>
             <a:r>
-              <a:rPr lang="zh-TW" altLang="en-US" smtClean="0"/>
+              <a:rPr lang="zh-TW" altLang="en-US"/>
               <a:t>按一下以編輯母片文字樣式</a:t>
             </a:r>
           </a:p>
           <a:p>
             <a:pPr lvl="1"/>
             <a:r>
-              <a:rPr lang="zh-TW" altLang="en-US" smtClean="0"/>
+              <a:rPr lang="zh-TW" altLang="en-US"/>
               <a:t>第二層</a:t>
             </a:r>
           </a:p>
           <a:p>
             <a:pPr lvl="2"/>
             <a:r>
-              <a:rPr lang="zh-TW" altLang="en-US" smtClean="0"/>
+              <a:rPr lang="zh-TW" altLang="en-US"/>
               <a:t>第三層</a:t>
             </a:r>
           </a:p>
           <a:p>
             <a:pPr lvl="3"/>
             <a:r>
-              <a:rPr lang="zh-TW" altLang="en-US" smtClean="0"/>
+              <a:rPr lang="zh-TW" altLang="en-US"/>
               <a:t>第四層</a:t>
             </a:r>
           </a:p>
           <a:p>
             <a:pPr lvl="4"/>
             <a:r>
-              <a:rPr lang="zh-TW" altLang="en-US" smtClean="0"/>
+              <a:rPr lang="zh-TW" altLang="en-US"/>
               <a:t>第五層</a:t>
             </a:r>
-            <a:endParaRPr lang="zh-TW" altLang="en-US"/>
           </a:p>
         </p:txBody>
       </p:sp>
@@ -2691,7 +2672,7 @@
           <a:p>
             <a:fld id="{1169722A-0BAF-4B82-A8FD-B3157334DE09}" type="datetimeFigureOut">
               <a:rPr lang="zh-TW" altLang="en-US" smtClean="0"/>
-              <a:t>2020/2/6</a:t>
+              <a:t>2025/5/9</a:t>
             </a:fld>
             <a:endParaRPr lang="zh-TW" altLang="en-US"/>
           </a:p>
@@ -3071,254 +3052,34 @@
             <p:ph type="title"/>
           </p:nvPr>
         </p:nvSpPr>
-        <p:spPr/>
-        <p:txBody>
-          <a:bodyPr/>
-          <a:lstStyle/>
-          <a:p>
-            <a:r>
-              <a:rPr lang="zh-TW" altLang="en-US" b="1" dirty="0">
+        <p:spPr>
+          <a:xfrm>
+            <a:off x="0" y="2660915"/>
+            <a:ext cx="12192000" cy="1143000"/>
+          </a:xfrm>
+        </p:spPr>
+        <p:txBody>
+          <a:bodyPr>
+            <a:noAutofit/>
+          </a:bodyPr>
+          <a:lstStyle/>
+          <a:p>
+            <a:r>
+              <a:rPr lang="zh-TW" altLang="en-US" sz="7200" b="1" i="1" dirty="0">
                 <a:solidFill>
                   <a:srgbClr val="660033"/>
                 </a:solidFill>
+                <a:effectLst>
+                  <a:outerShdw blurRad="38100" dist="38100" dir="2700000" algn="tl">
+                    <a:srgbClr val="000000">
+                      <a:alpha val="43137"/>
+                    </a:srgbClr>
+                  </a:outerShdw>
+                </a:effectLst>
                 <a:latin typeface="微軟正黑體" pitchFamily="34" charset="-120"/>
                 <a:ea typeface="微軟正黑體" pitchFamily="34" charset="-120"/>
               </a:rPr>
               <a:t>看見神的愛</a:t>
-            </a:r>
-          </a:p>
-        </p:txBody>
-      </p:sp>
-      <p:sp>
-        <p:nvSpPr>
-          <p:cNvPr id="5" name="內容版面配置區 4"/>
-          <p:cNvSpPr>
-            <a:spLocks noGrp="1"/>
-          </p:cNvSpPr>
-          <p:nvPr>
-            <p:ph idx="1"/>
-          </p:nvPr>
-        </p:nvSpPr>
-        <p:spPr>
-          <a:xfrm>
-            <a:off x="1524000" y="1600201"/>
-            <a:ext cx="9144000" cy="4525963"/>
-          </a:xfrm>
-        </p:spPr>
-        <p:txBody>
-          <a:bodyPr>
-            <a:noAutofit/>
-          </a:bodyPr>
-          <a:lstStyle/>
-          <a:p>
-            <a:pPr algn="ctr">
-              <a:buNone/>
-            </a:pPr>
-            <a:r>
-              <a:rPr lang="zh-TW" altLang="en-US" sz="5400" b="1" dirty="0">
-                <a:solidFill>
-                  <a:srgbClr val="660033"/>
-                </a:solidFill>
-                <a:latin typeface="微軟正黑體" pitchFamily="34" charset="-120"/>
-                <a:ea typeface="微軟正黑體" pitchFamily="34" charset="-120"/>
-              </a:rPr>
-              <a:t>我看見神的</a:t>
-            </a:r>
-            <a:r>
-              <a:rPr lang="zh-TW" altLang="en-US" sz="5400" b="1" dirty="0">
-                <a:solidFill>
-                  <a:srgbClr val="660033"/>
-                </a:solidFill>
-                <a:latin typeface="微軟正黑體" pitchFamily="34" charset="-120"/>
-                <a:ea typeface="微軟正黑體" pitchFamily="34" charset="-120"/>
-              </a:rPr>
-              <a:t>愛  在</a:t>
-            </a:r>
-            <a:r>
-              <a:rPr lang="zh-TW" altLang="en-US" sz="5400" b="1" dirty="0">
-                <a:solidFill>
-                  <a:srgbClr val="660033"/>
-                </a:solidFill>
-                <a:latin typeface="微軟正黑體" pitchFamily="34" charset="-120"/>
-                <a:ea typeface="微軟正黑體" pitchFamily="34" charset="-120"/>
-              </a:rPr>
-              <a:t>溫暖的</a:t>
-            </a:r>
-            <a:r>
-              <a:rPr lang="zh-TW" altLang="en-US" sz="5400" b="1" dirty="0">
-                <a:solidFill>
-                  <a:srgbClr val="660033"/>
-                </a:solidFill>
-                <a:latin typeface="微軟正黑體" pitchFamily="34" charset="-120"/>
-                <a:ea typeface="微軟正黑體" pitchFamily="34" charset="-120"/>
-              </a:rPr>
-              <a:t>陽光</a:t>
-            </a:r>
-            <a:endParaRPr lang="en-US" altLang="zh-TW" sz="5400" b="1" dirty="0">
-              <a:solidFill>
-                <a:srgbClr val="660033"/>
-              </a:solidFill>
-              <a:latin typeface="微軟正黑體" pitchFamily="34" charset="-120"/>
-              <a:ea typeface="微軟正黑體" pitchFamily="34" charset="-120"/>
-            </a:endParaRPr>
-          </a:p>
-          <a:p>
-            <a:pPr algn="ctr">
-              <a:buNone/>
-            </a:pPr>
-            <a:r>
-              <a:rPr lang="zh-TW" altLang="en-US" sz="5400" b="1" dirty="0">
-                <a:solidFill>
-                  <a:srgbClr val="660033"/>
-                </a:solidFill>
-                <a:latin typeface="微軟正黑體" pitchFamily="34" charset="-120"/>
-                <a:ea typeface="微軟正黑體" pitchFamily="34" charset="-120"/>
-              </a:rPr>
-              <a:t>我</a:t>
-            </a:r>
-            <a:r>
-              <a:rPr lang="zh-TW" altLang="en-US" sz="5400" b="1" dirty="0">
-                <a:solidFill>
-                  <a:srgbClr val="660033"/>
-                </a:solidFill>
-                <a:latin typeface="微軟正黑體" pitchFamily="34" charset="-120"/>
-                <a:ea typeface="微軟正黑體" pitchFamily="34" charset="-120"/>
-              </a:rPr>
-              <a:t>看見神的</a:t>
-            </a:r>
-            <a:r>
-              <a:rPr lang="zh-TW" altLang="en-US" sz="5400" b="1" dirty="0">
-                <a:solidFill>
-                  <a:srgbClr val="660033"/>
-                </a:solidFill>
-                <a:latin typeface="微軟正黑體" pitchFamily="34" charset="-120"/>
-                <a:ea typeface="微軟正黑體" pitchFamily="34" charset="-120"/>
-              </a:rPr>
-              <a:t>愛  在</a:t>
-            </a:r>
-            <a:r>
-              <a:rPr lang="zh-TW" altLang="en-US" sz="5400" b="1" dirty="0">
-                <a:solidFill>
-                  <a:srgbClr val="660033"/>
-                </a:solidFill>
-                <a:latin typeface="微軟正黑體" pitchFamily="34" charset="-120"/>
-                <a:ea typeface="微軟正黑體" pitchFamily="34" charset="-120"/>
-              </a:rPr>
-              <a:t>澎湃的</a:t>
-            </a:r>
-            <a:r>
-              <a:rPr lang="zh-TW" altLang="en-US" sz="5400" b="1" dirty="0">
-                <a:solidFill>
-                  <a:srgbClr val="660033"/>
-                </a:solidFill>
-                <a:latin typeface="微軟正黑體" pitchFamily="34" charset="-120"/>
-                <a:ea typeface="微軟正黑體" pitchFamily="34" charset="-120"/>
-              </a:rPr>
-              <a:t>海洋</a:t>
-            </a:r>
-            <a:endParaRPr lang="en-US" altLang="zh-TW" sz="5400" b="1" dirty="0">
-              <a:solidFill>
-                <a:srgbClr val="660033"/>
-              </a:solidFill>
-              <a:latin typeface="微軟正黑體" pitchFamily="34" charset="-120"/>
-              <a:ea typeface="微軟正黑體" pitchFamily="34" charset="-120"/>
-            </a:endParaRPr>
-          </a:p>
-          <a:p>
-            <a:pPr algn="ctr">
-              <a:buNone/>
-            </a:pPr>
-            <a:r>
-              <a:rPr lang="zh-TW" altLang="en-US" sz="5400" b="1" dirty="0">
-                <a:solidFill>
-                  <a:srgbClr val="660033"/>
-                </a:solidFill>
-                <a:latin typeface="微軟正黑體" pitchFamily="34" charset="-120"/>
-                <a:ea typeface="微軟正黑體" pitchFamily="34" charset="-120"/>
-              </a:rPr>
-              <a:t>我看見神的</a:t>
-            </a:r>
-            <a:r>
-              <a:rPr lang="zh-TW" altLang="en-US" sz="5400" b="1" dirty="0">
-                <a:solidFill>
-                  <a:srgbClr val="660033"/>
-                </a:solidFill>
-                <a:latin typeface="微軟正黑體" pitchFamily="34" charset="-120"/>
-                <a:ea typeface="微軟正黑體" pitchFamily="34" charset="-120"/>
-              </a:rPr>
-              <a:t>愛  在</a:t>
-            </a:r>
-            <a:r>
-              <a:rPr lang="zh-TW" altLang="en-US" sz="5400" b="1" dirty="0">
-                <a:solidFill>
-                  <a:srgbClr val="660033"/>
-                </a:solidFill>
-                <a:latin typeface="微軟正黑體" pitchFamily="34" charset="-120"/>
-                <a:ea typeface="微軟正黑體" pitchFamily="34" charset="-120"/>
-              </a:rPr>
-              <a:t>憐憫的</a:t>
-            </a:r>
-            <a:r>
-              <a:rPr lang="zh-TW" altLang="en-US" sz="5400" b="1" dirty="0">
-                <a:solidFill>
-                  <a:srgbClr val="660033"/>
-                </a:solidFill>
-                <a:latin typeface="微軟正黑體" pitchFamily="34" charset="-120"/>
-                <a:ea typeface="微軟正黑體" pitchFamily="34" charset="-120"/>
-              </a:rPr>
-              <a:t>心腸</a:t>
-            </a:r>
-            <a:endParaRPr lang="en-US" altLang="zh-TW" sz="5400" b="1" dirty="0">
-              <a:solidFill>
-                <a:srgbClr val="660033"/>
-              </a:solidFill>
-              <a:latin typeface="微軟正黑體" pitchFamily="34" charset="-120"/>
-              <a:ea typeface="微軟正黑體" pitchFamily="34" charset="-120"/>
-            </a:endParaRPr>
-          </a:p>
-          <a:p>
-            <a:pPr algn="ctr">
-              <a:buNone/>
-            </a:pPr>
-            <a:r>
-              <a:rPr lang="zh-TW" altLang="en-US" sz="5400" b="1" dirty="0">
-                <a:solidFill>
-                  <a:srgbClr val="660033"/>
-                </a:solidFill>
-                <a:latin typeface="微軟正黑體" pitchFamily="34" charset="-120"/>
-                <a:ea typeface="微軟正黑體" pitchFamily="34" charset="-120"/>
-              </a:rPr>
-              <a:t>我</a:t>
-            </a:r>
-            <a:r>
-              <a:rPr lang="zh-TW" altLang="en-US" sz="5400" b="1" dirty="0">
-                <a:solidFill>
-                  <a:srgbClr val="660033"/>
-                </a:solidFill>
-                <a:latin typeface="微軟正黑體" pitchFamily="34" charset="-120"/>
-                <a:ea typeface="微軟正黑體" pitchFamily="34" charset="-120"/>
-              </a:rPr>
-              <a:t>看見神的</a:t>
-            </a:r>
-            <a:r>
-              <a:rPr lang="zh-TW" altLang="en-US" sz="5400" b="1" dirty="0">
-                <a:solidFill>
-                  <a:srgbClr val="660033"/>
-                </a:solidFill>
-                <a:latin typeface="微軟正黑體" pitchFamily="34" charset="-120"/>
-                <a:ea typeface="微軟正黑體" pitchFamily="34" charset="-120"/>
-              </a:rPr>
-              <a:t>愛  在</a:t>
-            </a:r>
-            <a:r>
-              <a:rPr lang="zh-TW" altLang="en-US" sz="5400" b="1" dirty="0">
-                <a:solidFill>
-                  <a:srgbClr val="660033"/>
-                </a:solidFill>
-                <a:latin typeface="微軟正黑體" pitchFamily="34" charset="-120"/>
-                <a:ea typeface="微軟正黑體" pitchFamily="34" charset="-120"/>
-              </a:rPr>
-              <a:t>你我的臉上</a:t>
             </a:r>
           </a:p>
         </p:txBody>
@@ -3350,51 +3111,175 @@
       </p:grpSpPr>
       <p:sp>
         <p:nvSpPr>
-          <p:cNvPr id="4" name="標題 3"/>
-          <p:cNvSpPr>
-            <a:spLocks noGrp="1"/>
-          </p:cNvSpPr>
-          <p:nvPr>
-            <p:ph type="title"/>
-          </p:nvPr>
-        </p:nvSpPr>
-        <p:spPr/>
-        <p:txBody>
-          <a:bodyPr/>
-          <a:lstStyle/>
-          <a:p>
-            <a:r>
-              <a:rPr lang="zh-TW" altLang="en-US" b="1" dirty="0">
+          <p:cNvPr id="5" name="內容版面配置區 4"/>
+          <p:cNvSpPr>
+            <a:spLocks noGrp="1"/>
+          </p:cNvSpPr>
+          <p:nvPr>
+            <p:ph idx="1"/>
+          </p:nvPr>
+        </p:nvSpPr>
+        <p:spPr>
+          <a:xfrm>
+            <a:off x="0" y="2084853"/>
+            <a:ext cx="12192000" cy="2404863"/>
+          </a:xfrm>
+        </p:spPr>
+        <p:txBody>
+          <a:bodyPr anchor="ctr">
+            <a:normAutofit/>
+          </a:bodyPr>
+          <a:lstStyle/>
+          <a:p>
+            <a:pPr algn="ctr">
+              <a:buNone/>
+            </a:pPr>
+            <a:r>
+              <a:rPr lang="zh-TW" altLang="en-US" sz="6400" b="1" dirty="0">
                 <a:solidFill>
                   <a:srgbClr val="660033"/>
                 </a:solidFill>
                 <a:latin typeface="微軟正黑體" pitchFamily="34" charset="-120"/>
                 <a:ea typeface="微軟正黑體" pitchFamily="34" charset="-120"/>
               </a:rPr>
-              <a:t>看見神的愛</a:t>
-            </a:r>
-          </a:p>
-        </p:txBody>
-      </p:sp>
-      <p:sp>
-        <p:nvSpPr>
-          <p:cNvPr id="5" name="內容版面配置區 4"/>
-          <p:cNvSpPr>
-            <a:spLocks noGrp="1"/>
-          </p:cNvSpPr>
-          <p:nvPr>
-            <p:ph idx="1"/>
-          </p:nvPr>
+              <a:t>我看見神的愛  在溫暖的陽光</a:t>
+            </a:r>
+          </a:p>
+          <a:p>
+            <a:pPr algn="ctr">
+              <a:buNone/>
+            </a:pPr>
+            <a:r>
+              <a:rPr lang="zh-TW" altLang="en-US" sz="6400" b="1" dirty="0">
+                <a:solidFill>
+                  <a:srgbClr val="660033"/>
+                </a:solidFill>
+                <a:latin typeface="微軟正黑體" pitchFamily="34" charset="-120"/>
+                <a:ea typeface="微軟正黑體" pitchFamily="34" charset="-120"/>
+              </a:rPr>
+              <a:t>我看見神的愛  在澎湃的海洋</a:t>
+            </a:r>
+          </a:p>
+        </p:txBody>
+      </p:sp>
+      <p:sp>
+        <p:nvSpPr>
+          <p:cNvPr id="3" name="TextBox 2"/>
+          <p:cNvSpPr txBox="1"/>
+          <p:nvPr/>
         </p:nvSpPr>
         <p:spPr>
           <a:xfrm>
-            <a:off x="1524000" y="1600201"/>
-            <a:ext cx="9144000" cy="4525963"/>
+            <a:off x="0" y="5157194"/>
+            <a:ext cx="12192000" cy="584775"/>
+          </a:xfrm>
+          <a:prstGeom prst="rect">
+            <a:avLst/>
+          </a:prstGeom>
+          <a:noFill/>
+        </p:spPr>
+        <p:txBody>
+          <a:bodyPr wrap="square" rtlCol="0">
+            <a:spAutoFit/>
+          </a:bodyPr>
+          <a:lstStyle/>
+          <a:p>
+            <a:pPr algn="ctr"/>
+            <a:r>
+              <a:rPr lang="en-US" sz="3200" b="1" dirty="0">
+                <a:solidFill>
+                  <a:srgbClr val="660033"/>
+                </a:solidFill>
+                <a:latin typeface="Microsoft JhengHei" panose="020B0604030504040204" pitchFamily="34" charset="-120"/>
+                <a:ea typeface="Microsoft JhengHei" panose="020B0604030504040204" pitchFamily="34" charset="-120"/>
+              </a:rPr>
+              <a:t>( </a:t>
+            </a:r>
+            <a:r>
+              <a:rPr lang="zh-CN" altLang="en-US" sz="3200" b="1" dirty="0">
+                <a:solidFill>
+                  <a:srgbClr val="660033"/>
+                </a:solidFill>
+                <a:latin typeface="Microsoft JhengHei" panose="020B0604030504040204" pitchFamily="34" charset="-120"/>
+                <a:ea typeface="Microsoft JhengHei" panose="020B0604030504040204" pitchFamily="34" charset="-120"/>
+              </a:rPr>
+              <a:t>正歌</a:t>
+            </a:r>
+            <a:r>
+              <a:rPr lang="en-US" sz="3200" b="1" dirty="0">
+                <a:solidFill>
+                  <a:srgbClr val="660033"/>
+                </a:solidFill>
+                <a:latin typeface="Microsoft JhengHei" panose="020B0604030504040204" pitchFamily="34" charset="-120"/>
+                <a:ea typeface="Microsoft JhengHei" panose="020B0604030504040204" pitchFamily="34" charset="-120"/>
+              </a:rPr>
+              <a:t> )</a:t>
+            </a:r>
+            <a:endParaRPr lang="vi-VN" sz="3200" b="1" dirty="0">
+              <a:solidFill>
+                <a:srgbClr val="660033"/>
+              </a:solidFill>
+              <a:ea typeface="Microsoft JhengHei" panose="020B0604030504040204" pitchFamily="34" charset="-120"/>
+            </a:endParaRPr>
+          </a:p>
+        </p:txBody>
+      </p:sp>
+    </p:spTree>
+  </p:cSld>
+  <p:clrMapOvr>
+    <a:masterClrMapping/>
+  </p:clrMapOvr>
+</p:sld>
+</file>
+
+<file path=ppt/slides/slide3.xml><?xml version="1.0" encoding="utf-8"?>
+<p:sld xmlns:a="http://schemas.openxmlformats.org/drawingml/2006/main" xmlns:r="http://schemas.openxmlformats.org/officeDocument/2006/relationships" xmlns:p="http://schemas.openxmlformats.org/presentationml/2006/main">
+  <p:cSld>
+    <p:spTree>
+      <p:nvGrpSpPr>
+        <p:cNvPr id="1" name="">
+          <a:extLst>
+            <a:ext uri="{FF2B5EF4-FFF2-40B4-BE49-F238E27FC236}">
+              <a16:creationId xmlns:a16="http://schemas.microsoft.com/office/drawing/2014/main" id="{B0F27829-F6B2-E0BD-FDBD-4CF64722EE1E}"/>
+            </a:ext>
+          </a:extLst>
+        </p:cNvPr>
+        <p:cNvGrpSpPr/>
+        <p:nvPr/>
+      </p:nvGrpSpPr>
+      <p:grpSpPr>
+        <a:xfrm>
+          <a:off x="0" y="0"/>
+          <a:ext cx="0" cy="0"/>
+          <a:chOff x="0" y="0"/>
+          <a:chExt cx="0" cy="0"/>
+        </a:xfrm>
+      </p:grpSpPr>
+      <p:sp>
+        <p:nvSpPr>
+          <p:cNvPr id="5" name="內容版面配置區 4">
+            <a:extLst>
+              <a:ext uri="{FF2B5EF4-FFF2-40B4-BE49-F238E27FC236}">
+                <a16:creationId xmlns:a16="http://schemas.microsoft.com/office/drawing/2014/main" id="{25BDC923-F841-D61A-736C-4E3F71732A15}"/>
+              </a:ext>
+            </a:extLst>
+          </p:cNvPr>
+          <p:cNvSpPr>
+            <a:spLocks noGrp="1"/>
+          </p:cNvSpPr>
+          <p:nvPr>
+            <p:ph idx="1"/>
+          </p:nvPr>
+        </p:nvSpPr>
+        <p:spPr>
+          <a:xfrm>
+            <a:off x="0" y="2084853"/>
+            <a:ext cx="12192000" cy="2404863"/>
           </a:xfrm>
         </p:spPr>
         <p:txBody>
-          <a:bodyPr>
-            <a:noAutofit/>
+          <a:bodyPr anchor="ctr">
+            <a:normAutofit/>
           </a:bodyPr>
           <a:lstStyle/>
           <a:p>
@@ -3402,7 +3287,170 @@
               <a:buNone/>
             </a:pPr>
             <a:r>
-              <a:rPr lang="zh-TW" altLang="en-US" sz="5400" b="1" dirty="0">
+              <a:rPr lang="zh-TW" altLang="en-US" sz="6400" b="1" dirty="0">
+                <a:solidFill>
+                  <a:srgbClr val="660033"/>
+                </a:solidFill>
+                <a:latin typeface="微軟正黑體" pitchFamily="34" charset="-120"/>
+                <a:ea typeface="微軟正黑體" pitchFamily="34" charset="-120"/>
+              </a:rPr>
+              <a:t>我看見神的愛  在憐憫的心腸</a:t>
+            </a:r>
+          </a:p>
+          <a:p>
+            <a:pPr algn="ctr">
+              <a:buNone/>
+            </a:pPr>
+            <a:r>
+              <a:rPr lang="zh-TW" altLang="en-US" sz="6400" b="1" dirty="0">
+                <a:solidFill>
+                  <a:srgbClr val="660033"/>
+                </a:solidFill>
+                <a:latin typeface="微軟正黑體" pitchFamily="34" charset="-120"/>
+                <a:ea typeface="微軟正黑體" pitchFamily="34" charset="-120"/>
+              </a:rPr>
+              <a:t>我看見神的愛  在你我的臉上</a:t>
+            </a:r>
+          </a:p>
+        </p:txBody>
+      </p:sp>
+      <p:sp>
+        <p:nvSpPr>
+          <p:cNvPr id="3" name="TextBox 2">
+            <a:extLst>
+              <a:ext uri="{FF2B5EF4-FFF2-40B4-BE49-F238E27FC236}">
+                <a16:creationId xmlns:a16="http://schemas.microsoft.com/office/drawing/2014/main" id="{944F664E-EDAA-39C8-BDC1-F52F6827D573}"/>
+              </a:ext>
+            </a:extLst>
+          </p:cNvPr>
+          <p:cNvSpPr txBox="1"/>
+          <p:nvPr/>
+        </p:nvSpPr>
+        <p:spPr>
+          <a:xfrm>
+            <a:off x="0" y="5157194"/>
+            <a:ext cx="12192000" cy="584775"/>
+          </a:xfrm>
+          <a:prstGeom prst="rect">
+            <a:avLst/>
+          </a:prstGeom>
+          <a:noFill/>
+        </p:spPr>
+        <p:txBody>
+          <a:bodyPr wrap="square" rtlCol="0">
+            <a:spAutoFit/>
+          </a:bodyPr>
+          <a:lstStyle/>
+          <a:p>
+            <a:pPr algn="ctr"/>
+            <a:r>
+              <a:rPr lang="en-US" sz="3200" b="1" dirty="0">
+                <a:solidFill>
+                  <a:srgbClr val="660033"/>
+                </a:solidFill>
+                <a:latin typeface="Microsoft JhengHei" panose="020B0604030504040204" pitchFamily="34" charset="-120"/>
+                <a:ea typeface="Microsoft JhengHei" panose="020B0604030504040204" pitchFamily="34" charset="-120"/>
+              </a:rPr>
+              <a:t>( </a:t>
+            </a:r>
+            <a:r>
+              <a:rPr lang="zh-CN" altLang="en-US" sz="3200" b="1" dirty="0">
+                <a:solidFill>
+                  <a:srgbClr val="660033"/>
+                </a:solidFill>
+                <a:latin typeface="Microsoft JhengHei" panose="020B0604030504040204" pitchFamily="34" charset="-120"/>
+                <a:ea typeface="Microsoft JhengHei" panose="020B0604030504040204" pitchFamily="34" charset="-120"/>
+              </a:rPr>
+              <a:t>正歌</a:t>
+            </a:r>
+            <a:r>
+              <a:rPr lang="en-US" sz="3200" b="1" dirty="0">
+                <a:solidFill>
+                  <a:srgbClr val="660033"/>
+                </a:solidFill>
+                <a:latin typeface="Microsoft JhengHei" panose="020B0604030504040204" pitchFamily="34" charset="-120"/>
+                <a:ea typeface="Microsoft JhengHei" panose="020B0604030504040204" pitchFamily="34" charset="-120"/>
+              </a:rPr>
+              <a:t> )</a:t>
+            </a:r>
+            <a:endParaRPr lang="vi-VN" sz="3200" b="1" dirty="0">
+              <a:solidFill>
+                <a:srgbClr val="660033"/>
+              </a:solidFill>
+              <a:ea typeface="Microsoft JhengHei" panose="020B0604030504040204" pitchFamily="34" charset="-120"/>
+            </a:endParaRPr>
+          </a:p>
+        </p:txBody>
+      </p:sp>
+    </p:spTree>
+    <p:extLst>
+      <p:ext uri="{BB962C8B-B14F-4D97-AF65-F5344CB8AC3E}">
+        <p14:creationId xmlns:p14="http://schemas.microsoft.com/office/powerpoint/2010/main" val="1491849368"/>
+      </p:ext>
+    </p:extLst>
+  </p:cSld>
+  <p:clrMapOvr>
+    <a:masterClrMapping/>
+  </p:clrMapOvr>
+</p:sld>
+</file>
+
+<file path=ppt/slides/slide4.xml><?xml version="1.0" encoding="utf-8"?>
+<p:sld xmlns:a="http://schemas.openxmlformats.org/drawingml/2006/main" xmlns:r="http://schemas.openxmlformats.org/officeDocument/2006/relationships" xmlns:p="http://schemas.openxmlformats.org/presentationml/2006/main">
+  <p:cSld>
+    <p:spTree>
+      <p:nvGrpSpPr>
+        <p:cNvPr id="1" name="">
+          <a:extLst>
+            <a:ext uri="{FF2B5EF4-FFF2-40B4-BE49-F238E27FC236}">
+              <a16:creationId xmlns:a16="http://schemas.microsoft.com/office/drawing/2014/main" id="{70816ECB-CD04-723D-D95C-A125EF22A0CE}"/>
+            </a:ext>
+          </a:extLst>
+        </p:cNvPr>
+        <p:cNvGrpSpPr/>
+        <p:nvPr/>
+      </p:nvGrpSpPr>
+      <p:grpSpPr>
+        <a:xfrm>
+          <a:off x="0" y="0"/>
+          <a:ext cx="0" cy="0"/>
+          <a:chOff x="0" y="0"/>
+          <a:chExt cx="0" cy="0"/>
+        </a:xfrm>
+      </p:grpSpPr>
+      <p:sp>
+        <p:nvSpPr>
+          <p:cNvPr id="5" name="內容版面配置區 4">
+            <a:extLst>
+              <a:ext uri="{FF2B5EF4-FFF2-40B4-BE49-F238E27FC236}">
+                <a16:creationId xmlns:a16="http://schemas.microsoft.com/office/drawing/2014/main" id="{7E0D3DFF-FF75-90F8-B209-7740DF5F65A6}"/>
+              </a:ext>
+            </a:extLst>
+          </p:cNvPr>
+          <p:cNvSpPr>
+            <a:spLocks noGrp="1"/>
+          </p:cNvSpPr>
+          <p:nvPr>
+            <p:ph idx="1"/>
+          </p:nvPr>
+        </p:nvSpPr>
+        <p:spPr>
+          <a:xfrm>
+            <a:off x="0" y="2084853"/>
+            <a:ext cx="12192000" cy="2404863"/>
+          </a:xfrm>
+        </p:spPr>
+        <p:txBody>
+          <a:bodyPr anchor="ctr">
+            <a:normAutofit/>
+          </a:bodyPr>
+          <a:lstStyle/>
+          <a:p>
+            <a:pPr algn="ctr">
+              <a:buNone/>
+            </a:pPr>
+            <a:r>
+              <a:rPr lang="zh-TW" altLang="en-US" sz="6400" b="1" dirty="0">
                 <a:solidFill>
                   <a:srgbClr val="660033"/>
                 </a:solidFill>
@@ -3411,20 +3459,13 @@
               </a:rPr>
               <a:t>在每個微笑  在每個擁抱</a:t>
             </a:r>
-            <a:endParaRPr lang="en-US" altLang="zh-TW" sz="5400" b="1" dirty="0">
-              <a:solidFill>
-                <a:srgbClr val="660033"/>
-              </a:solidFill>
-              <a:latin typeface="微軟正黑體" pitchFamily="34" charset="-120"/>
-              <a:ea typeface="微軟正黑體" pitchFamily="34" charset="-120"/>
-            </a:endParaRPr>
           </a:p>
           <a:p>
             <a:pPr algn="ctr">
               <a:buNone/>
             </a:pPr>
             <a:r>
-              <a:rPr lang="zh-TW" altLang="en-US" sz="5400" b="1" dirty="0">
+              <a:rPr lang="zh-TW" altLang="en-US" sz="6400" b="1" dirty="0">
                 <a:solidFill>
                   <a:srgbClr val="660033"/>
                 </a:solidFill>
@@ -3434,12 +3475,145 @@
               <a:t>在每個祈禱  我能看見神的愛 </a:t>
             </a:r>
           </a:p>
+        </p:txBody>
+      </p:sp>
+      <p:sp>
+        <p:nvSpPr>
+          <p:cNvPr id="3" name="TextBox 2">
+            <a:extLst>
+              <a:ext uri="{FF2B5EF4-FFF2-40B4-BE49-F238E27FC236}">
+                <a16:creationId xmlns:a16="http://schemas.microsoft.com/office/drawing/2014/main" id="{03250D40-441C-AD57-C38A-E9D8BCF6E9C1}"/>
+              </a:ext>
+            </a:extLst>
+          </p:cNvPr>
+          <p:cNvSpPr txBox="1"/>
+          <p:nvPr/>
+        </p:nvSpPr>
+        <p:spPr>
+          <a:xfrm>
+            <a:off x="0" y="5157194"/>
+            <a:ext cx="12192000" cy="584775"/>
+          </a:xfrm>
+          <a:prstGeom prst="rect">
+            <a:avLst/>
+          </a:prstGeom>
+          <a:noFill/>
+        </p:spPr>
+        <p:txBody>
+          <a:bodyPr wrap="square" rtlCol="0">
+            <a:spAutoFit/>
+          </a:bodyPr>
+          <a:lstStyle/>
+          <a:p>
+            <a:pPr algn="ctr"/>
+            <a:r>
+              <a:rPr lang="en-US" sz="3200" b="1" dirty="0">
+                <a:solidFill>
+                  <a:srgbClr val="660033"/>
+                </a:solidFill>
+                <a:latin typeface="Microsoft JhengHei" panose="020B0604030504040204" pitchFamily="34" charset="-120"/>
+                <a:ea typeface="Microsoft JhengHei" panose="020B0604030504040204" pitchFamily="34" charset="-120"/>
+              </a:rPr>
+              <a:t>( </a:t>
+            </a:r>
+            <a:r>
+              <a:rPr lang="zh-CN" altLang="en-US" sz="3200" b="1" dirty="0">
+                <a:solidFill>
+                  <a:srgbClr val="660033"/>
+                </a:solidFill>
+                <a:latin typeface="Microsoft JhengHei" panose="020B0604030504040204" pitchFamily="34" charset="-120"/>
+                <a:ea typeface="Microsoft JhengHei" panose="020B0604030504040204" pitchFamily="34" charset="-120"/>
+              </a:rPr>
+              <a:t>副歌</a:t>
+            </a:r>
+            <a:r>
+              <a:rPr lang="en-US" sz="3200" b="1" dirty="0">
+                <a:solidFill>
+                  <a:srgbClr val="660033"/>
+                </a:solidFill>
+                <a:latin typeface="Microsoft JhengHei" panose="020B0604030504040204" pitchFamily="34" charset="-120"/>
+                <a:ea typeface="Microsoft JhengHei" panose="020B0604030504040204" pitchFamily="34" charset="-120"/>
+              </a:rPr>
+              <a:t> )</a:t>
+            </a:r>
+            <a:endParaRPr lang="vi-VN" sz="3200" b="1" dirty="0">
+              <a:solidFill>
+                <a:srgbClr val="660033"/>
+              </a:solidFill>
+              <a:ea typeface="Microsoft JhengHei" panose="020B0604030504040204" pitchFamily="34" charset="-120"/>
+            </a:endParaRPr>
+          </a:p>
+        </p:txBody>
+      </p:sp>
+    </p:spTree>
+    <p:extLst>
+      <p:ext uri="{BB962C8B-B14F-4D97-AF65-F5344CB8AC3E}">
+        <p14:creationId xmlns:p14="http://schemas.microsoft.com/office/powerpoint/2010/main" val="384742605"/>
+      </p:ext>
+    </p:extLst>
+  </p:cSld>
+  <p:clrMapOvr>
+    <a:masterClrMapping/>
+  </p:clrMapOvr>
+</p:sld>
+</file>
+
+<file path=ppt/slides/slide5.xml><?xml version="1.0" encoding="utf-8"?>
+<p:sld xmlns:a="http://schemas.openxmlformats.org/drawingml/2006/main" xmlns:r="http://schemas.openxmlformats.org/officeDocument/2006/relationships" xmlns:p="http://schemas.openxmlformats.org/presentationml/2006/main">
+  <p:cSld>
+    <p:spTree>
+      <p:nvGrpSpPr>
+        <p:cNvPr id="1" name="">
+          <a:extLst>
+            <a:ext uri="{FF2B5EF4-FFF2-40B4-BE49-F238E27FC236}">
+              <a16:creationId xmlns:a16="http://schemas.microsoft.com/office/drawing/2014/main" id="{1DAC01AC-679C-4A98-F9D1-BCBC1FAF3DA3}"/>
+            </a:ext>
+          </a:extLst>
+        </p:cNvPr>
+        <p:cNvGrpSpPr/>
+        <p:nvPr/>
+      </p:nvGrpSpPr>
+      <p:grpSpPr>
+        <a:xfrm>
+          <a:off x="0" y="0"/>
+          <a:ext cx="0" cy="0"/>
+          <a:chOff x="0" y="0"/>
+          <a:chExt cx="0" cy="0"/>
+        </a:xfrm>
+      </p:grpSpPr>
+      <p:sp>
+        <p:nvSpPr>
+          <p:cNvPr id="5" name="內容版面配置區 4">
+            <a:extLst>
+              <a:ext uri="{FF2B5EF4-FFF2-40B4-BE49-F238E27FC236}">
+                <a16:creationId xmlns:a16="http://schemas.microsoft.com/office/drawing/2014/main" id="{D45F0578-B6D1-7F8E-DEC1-18EF555BE871}"/>
+              </a:ext>
+            </a:extLst>
+          </p:cNvPr>
+          <p:cNvSpPr>
+            <a:spLocks noGrp="1"/>
+          </p:cNvSpPr>
+          <p:nvPr>
+            <p:ph idx="1"/>
+          </p:nvPr>
+        </p:nvSpPr>
+        <p:spPr>
+          <a:xfrm>
+            <a:off x="0" y="2084853"/>
+            <a:ext cx="12192000" cy="2404863"/>
+          </a:xfrm>
+        </p:spPr>
+        <p:txBody>
+          <a:bodyPr anchor="ctr">
+            <a:normAutofit/>
+          </a:bodyPr>
+          <a:lstStyle/>
           <a:p>
             <a:pPr algn="ctr">
               <a:buNone/>
             </a:pPr>
             <a:r>
-              <a:rPr lang="zh-TW" altLang="en-US" sz="5400" b="1" dirty="0">
+              <a:rPr lang="zh-TW" altLang="en-US" sz="6400" b="1" dirty="0">
                 <a:solidFill>
                   <a:srgbClr val="660033"/>
                 </a:solidFill>
@@ -3448,20 +3622,13 @@
               </a:rPr>
               <a:t>在每個微笑  在每個擁抱</a:t>
             </a:r>
-            <a:endParaRPr lang="en-US" altLang="zh-TW" sz="5400" b="1" dirty="0">
-              <a:solidFill>
-                <a:srgbClr val="660033"/>
-              </a:solidFill>
-              <a:latin typeface="微軟正黑體" pitchFamily="34" charset="-120"/>
-              <a:ea typeface="微軟正黑體" pitchFamily="34" charset="-120"/>
-            </a:endParaRPr>
           </a:p>
           <a:p>
             <a:pPr algn="ctr">
               <a:buNone/>
             </a:pPr>
             <a:r>
-              <a:rPr lang="zh-TW" altLang="en-US" sz="5400" b="1" dirty="0">
+              <a:rPr lang="zh-TW" altLang="en-US" sz="6400" b="1" dirty="0">
                 <a:solidFill>
                   <a:srgbClr val="660033"/>
                 </a:solidFill>
@@ -3470,17 +3637,83 @@
               </a:rPr>
               <a:t>在每個祈禱  我看見神的愛</a:t>
             </a:r>
-            <a:endParaRPr lang="zh-TW" altLang="en-US" sz="5400" b="1" dirty="0">
+          </a:p>
+        </p:txBody>
+      </p:sp>
+      <p:sp>
+        <p:nvSpPr>
+          <p:cNvPr id="3" name="TextBox 2">
+            <a:extLst>
+              <a:ext uri="{FF2B5EF4-FFF2-40B4-BE49-F238E27FC236}">
+                <a16:creationId xmlns:a16="http://schemas.microsoft.com/office/drawing/2014/main" id="{98A3BD12-B02F-F0A7-0383-85EDF95E239C}"/>
+              </a:ext>
+            </a:extLst>
+          </p:cNvPr>
+          <p:cNvSpPr txBox="1"/>
+          <p:nvPr/>
+        </p:nvSpPr>
+        <p:spPr>
+          <a:xfrm>
+            <a:off x="0" y="5157194"/>
+            <a:ext cx="12192000" cy="584775"/>
+          </a:xfrm>
+          <a:prstGeom prst="rect">
+            <a:avLst/>
+          </a:prstGeom>
+          <a:noFill/>
+        </p:spPr>
+        <p:txBody>
+          <a:bodyPr wrap="square" rtlCol="0">
+            <a:spAutoFit/>
+          </a:bodyPr>
+          <a:lstStyle/>
+          <a:p>
+            <a:pPr algn="ctr"/>
+            <a:r>
+              <a:rPr lang="en-US" sz="3200" b="1" dirty="0">
+                <a:solidFill>
+                  <a:srgbClr val="660033"/>
+                </a:solidFill>
+                <a:latin typeface="Microsoft JhengHei" panose="020B0604030504040204" pitchFamily="34" charset="-120"/>
+                <a:ea typeface="Microsoft JhengHei" panose="020B0604030504040204" pitchFamily="34" charset="-120"/>
+              </a:rPr>
+              <a:t>( </a:t>
+            </a:r>
+            <a:r>
+              <a:rPr lang="zh-CN" altLang="en-US" sz="3200" b="1" dirty="0">
+                <a:solidFill>
+                  <a:srgbClr val="660033"/>
+                </a:solidFill>
+                <a:latin typeface="Microsoft JhengHei" panose="020B0604030504040204" pitchFamily="34" charset="-120"/>
+                <a:ea typeface="Microsoft JhengHei" panose="020B0604030504040204" pitchFamily="34" charset="-120"/>
+              </a:rPr>
+              <a:t>副歌</a:t>
+            </a:r>
+            <a:r>
+              <a:rPr lang="en-US" sz="3200" b="1" dirty="0">
+                <a:solidFill>
+                  <a:srgbClr val="660033"/>
+                </a:solidFill>
+                <a:latin typeface="Microsoft JhengHei" panose="020B0604030504040204" pitchFamily="34" charset="-120"/>
+                <a:ea typeface="Microsoft JhengHei" panose="020B0604030504040204" pitchFamily="34" charset="-120"/>
+              </a:rPr>
+              <a:t> )</a:t>
+            </a:r>
+            <a:endParaRPr lang="vi-VN" sz="3200" b="1" dirty="0">
               <a:solidFill>
                 <a:srgbClr val="660033"/>
               </a:solidFill>
-              <a:latin typeface="微軟正黑體" pitchFamily="34" charset="-120"/>
-              <a:ea typeface="微軟正黑體" pitchFamily="34" charset="-120"/>
+              <a:ea typeface="Microsoft JhengHei" panose="020B0604030504040204" pitchFamily="34" charset="-120"/>
             </a:endParaRPr>
           </a:p>
         </p:txBody>
       </p:sp>
     </p:spTree>
+    <p:extLst>
+      <p:ext uri="{BB962C8B-B14F-4D97-AF65-F5344CB8AC3E}">
+        <p14:creationId xmlns:p14="http://schemas.microsoft.com/office/powerpoint/2010/main" val="912776689"/>
+      </p:ext>
+    </p:extLst>
   </p:cSld>
   <p:clrMapOvr>
     <a:masterClrMapping/>
